--- a/library/seminars/sem-06/rendered/sem-06-n35.pptx
+++ b/library/seminars/sem-06/rendered/sem-06-n35.pptx
@@ -502,19 +502,19 @@
           <a:lstStyle/>
           <a:p>
             <a:r>
-              <a:t>Доступ наружу у агента уже есть: сервер отдаёт ему то, чего в репозитории не было. Второй ход встречный. Часть работы уходит отдельному исполнителю с собственным окном; делегировать так вы уже умеете, и это не стоит ни строчки настройки.</a:t>
+              <a:t>Доступ наружу у агента уже есть: сервер отдаёт ему то, чего в репозитории не было. Второй ход встречный: часть работы уходит отдельному исполнителю со своим контекстом, и стоит это ноль строчек настройки.</a:t>
             </a:r>
           </a:p>
           <a:p/>
           <a:p>
             <a:r>
-              <a:t>Первая развилка ступени — цена короткого ответа. Что с ней делать, я спрошу через несколько экранов. Догадку, которая придёт вам сейчас, запомните: мы её проверим.</a:t>
+              <a:t>Первая развилка ступени — цена поиска, который нужен, чтобы продолжить работу здесь же. Что с ней делать, спрошу через несколько экранов. Догадку, которая придёт вам сейчас, запомните: мы её проверим.</a:t>
             </a:r>
           </a:p>
           <a:p/>
           <a:p>
             <a:r>
-              <a:t>Если спросят, при чём тут предыдущий блок: доступ наружу увеличивает то, что агент способен сделать сам за один присест, и вместе с объёмом работы растёт объём чтения, который эта работа втягивает в окно сессии. Два хода встречные, а предел у них один и тот же.</a:t>
+              <a:t>Если спросят, при чём тут предыдущий блок: доступ наружу увеличивает то, что агент способен сделать сам за один присест, и вместе с объёмом работы растёт объём чтения, который эта работа втягивает в контекст сессии. Два хода встречные, а предел у них один и тот же.</a:t>
             </a:r>
           </a:p>
           <a:p/>
@@ -532,7 +532,7 @@
           <a:p/>
           <a:p>
             <a:r>
-              <a:t>Если спросят, сколько стоит само делегирование: заведение роли — ноль строчек настройки, это правда. Масштаб стоит иначе, и цифра для него стоит шестым блоком на следующем экране, а подробности и честный пробел — в свидетельствах третьего кейса ступени.</a:t>
+              <a:t>Если спросят, сколько стоит само делегирование: заведение роли — ноль строчек настройки, это правда. Масштаб стоит иначе, и цифра для него стоит шестым блоком на одностраничнике, а подробности и честный пробел — в свидетельствах третьего кейса ступени.</a:t>
             </a:r>
           </a:p>
           <a:p/>
@@ -3814,7 +3814,7 @@
                 </a:solidFill>
                 <a:latin typeface="Arial"/>
               </a:rPr>
-              <a:t>Сорок файлов ради ответа в одно слово</a:t>
+              <a:t>Сорок файлов ради четырёх нужных мест</a:t>
             </a:r>
           </a:p>
         </p:txBody>
@@ -3856,7 +3856,7 @@
                 </a:solidFill>
                 <a:latin typeface="Arial"/>
               </a:rPr>
-              <a:t>Ответ — одна строка. Чтобы сказать её честно, нужно открыть сорок файлов, и правка, ради которой открыли сессию, всё ещё ждёт.</a:t>
+              <a:t>Что править — известно. Где править — лежит в сорока файлах, и прочитать их надо туда же, где эта правка уже объяснена.</a:t>
             </a:r>
           </a:p>
         </p:txBody>
@@ -4074,7 +4074,7 @@
                 </a:solidFill>
                 <a:latin typeface="Arial"/>
               </a:rPr>
-              <a:t>35</a:t>
+              <a:t>36</a:t>
             </a:r>
           </a:p>
         </p:txBody>
